--- a/templates/posts/october/2026-10-04-sun-ig-underwear-test.pptx
+++ b/templates/posts/october/2026-10-04-sun-ig-underwear-test.pptx
@@ -3717,7 +3717,7 @@
     <p:bg>
       <p:bgPr>
         <a:solidFill>
-          <a:srgbClr val="F4F1EA"/>
+          <a:srgbClr val="F3F1EA"/>
         </a:solidFill>
         <a:effectLst/>
       </p:bgPr>
@@ -3746,7 +3746,7 @@
             </a:avLst>
           </a:prstGeom>
           <a:solidFill>
-            <a:srgbClr val="156826"/>
+            <a:srgbClr val="31662F"/>
           </a:solidFill>
           <a:ln>
             <a:noFill/>
@@ -3805,7 +3805,7 @@
             <a:r>
               <a:rPr sz="2000" b="1" i="0" spc="200">
                 <a:solidFill>
-                  <a:srgbClr val="F4F1EA"/>
+                  <a:srgbClr val="F3F1EA"/>
                 </a:solidFill>
                 <a:latin typeface="Montserrat"/>
               </a:rPr>
@@ -3844,7 +3844,7 @@
             <a:r>
               <a:rPr sz="6400" b="1" i="0">
                 <a:solidFill>
-                  <a:srgbClr val="22371F"/>
+                  <a:srgbClr val="1E3F1D"/>
                 </a:solidFill>
                 <a:latin typeface="Montserrat"/>
               </a:rPr>
@@ -3993,7 +3993,7 @@
     <p:bg>
       <p:bgPr>
         <a:solidFill>
-          <a:srgbClr val="F4F1EA"/>
+          <a:srgbClr val="F3F1EA"/>
         </a:solidFill>
         <a:effectLst/>
       </p:bgPr>
@@ -4035,7 +4035,7 @@
             <a:r>
               <a:rPr sz="2200" b="1" i="0" spc="200">
                 <a:solidFill>
-                  <a:srgbClr val="156826"/>
+                  <a:srgbClr val="31662F"/>
                 </a:solidFill>
                 <a:latin typeface="Montserrat"/>
               </a:rPr>
@@ -4059,7 +4059,7 @@
             <a:avLst/>
           </a:prstGeom>
           <a:solidFill>
-            <a:srgbClr val="156826"/>
+            <a:srgbClr val="31662F"/>
           </a:solidFill>
           <a:ln>
             <a:noFill/>
@@ -4118,7 +4118,7 @@
             <a:r>
               <a:rPr sz="3400" b="1" i="0">
                 <a:solidFill>
-                  <a:srgbClr val="F4F1EA"/>
+                  <a:srgbClr val="F3F1EA"/>
                 </a:solidFill>
                 <a:latin typeface="Montserrat"/>
               </a:rPr>
@@ -4157,7 +4157,7 @@
             <a:r>
               <a:rPr sz="3800" b="0" i="0">
                 <a:solidFill>
-                  <a:srgbClr val="22371F"/>
+                  <a:srgbClr val="1E3F1D"/>
                 </a:solidFill>
                 <a:latin typeface="Source Sans 3"/>
               </a:rPr>
@@ -4181,7 +4181,7 @@
             <a:avLst/>
           </a:prstGeom>
           <a:solidFill>
-            <a:srgbClr val="156826"/>
+            <a:srgbClr val="31662F"/>
           </a:solidFill>
           <a:ln>
             <a:noFill/>
@@ -4240,7 +4240,7 @@
             <a:r>
               <a:rPr sz="3400" b="1" i="0">
                 <a:solidFill>
-                  <a:srgbClr val="F4F1EA"/>
+                  <a:srgbClr val="F3F1EA"/>
                 </a:solidFill>
                 <a:latin typeface="Montserrat"/>
               </a:rPr>
@@ -4279,7 +4279,7 @@
             <a:r>
               <a:rPr sz="3800" b="0" i="0">
                 <a:solidFill>
-                  <a:srgbClr val="22371F"/>
+                  <a:srgbClr val="1E3F1D"/>
                 </a:solidFill>
                 <a:latin typeface="Source Sans 3"/>
               </a:rPr>
@@ -4303,7 +4303,7 @@
             <a:avLst/>
           </a:prstGeom>
           <a:solidFill>
-            <a:srgbClr val="156826"/>
+            <a:srgbClr val="31662F"/>
           </a:solidFill>
           <a:ln>
             <a:noFill/>
@@ -4362,7 +4362,7 @@
             <a:r>
               <a:rPr sz="3400" b="1" i="0">
                 <a:solidFill>
-                  <a:srgbClr val="F4F1EA"/>
+                  <a:srgbClr val="F3F1EA"/>
                 </a:solidFill>
                 <a:latin typeface="Montserrat"/>
               </a:rPr>
@@ -4401,7 +4401,7 @@
             <a:r>
               <a:rPr sz="3800" b="0" i="0">
                 <a:solidFill>
-                  <a:srgbClr val="22371F"/>
+                  <a:srgbClr val="1E3F1D"/>
                 </a:solidFill>
                 <a:latin typeface="Source Sans 3"/>
               </a:rPr>
@@ -4465,7 +4465,7 @@
     <p:bg>
       <p:bgPr>
         <a:solidFill>
-          <a:srgbClr val="F4F1EA"/>
+          <a:srgbClr val="F3F1EA"/>
         </a:solidFill>
         <a:effectLst/>
       </p:bgPr>
@@ -4577,7 +4577,7 @@
             <a:avLst/>
           </a:prstGeom>
           <a:solidFill>
-            <a:srgbClr val="59A66C"/>
+            <a:srgbClr val="31662F"/>
           </a:solidFill>
           <a:ln>
             <a:noFill/>
@@ -4648,7 +4648,7 @@
             </a:pathLst>
           </a:custGeom>
           <a:solidFill>
-            <a:srgbClr val="F4F1EA"/>
+            <a:srgbClr val="F3F1EA"/>
           </a:solidFill>
           <a:ln>
             <a:noFill/>
@@ -4707,7 +4707,7 @@
             <a:r>
               <a:rPr sz="5600" b="1" i="0">
                 <a:solidFill>
-                  <a:srgbClr val="22371F"/>
+                  <a:srgbClr val="1E3F1D"/>
                 </a:solidFill>
                 <a:latin typeface="Montserrat"/>
               </a:rPr>
@@ -4810,7 +4810,7 @@
     <p:bg>
       <p:bgPr>
         <a:solidFill>
-          <a:srgbClr val="F4F1EA"/>
+          <a:srgbClr val="F3F1EA"/>
         </a:solidFill>
         <a:effectLst/>
       </p:bgPr>
@@ -4922,7 +4922,7 @@
             <a:avLst/>
           </a:prstGeom>
           <a:solidFill>
-            <a:srgbClr val="4F3433"/>
+            <a:srgbClr val="4C3634"/>
           </a:solidFill>
           <a:ln>
             <a:noFill/>
@@ -4981,7 +4981,7 @@
             <a:r>
               <a:rPr sz="6000" b="1" i="0">
                 <a:solidFill>
-                  <a:srgbClr val="F4F1EA"/>
+                  <a:srgbClr val="F3F1EA"/>
                 </a:solidFill>
                 <a:latin typeface="Montserrat"/>
               </a:rPr>
@@ -5020,7 +5020,7 @@
             <a:r>
               <a:rPr sz="5600" b="1" i="0">
                 <a:solidFill>
-                  <a:srgbClr val="22371F"/>
+                  <a:srgbClr val="1E3F1D"/>
                 </a:solidFill>
                 <a:latin typeface="Montserrat"/>
               </a:rPr>
